--- a/docs/presentation/CA-CFAR vs THOR — Brief.pptx
+++ b/docs/presentation/CA-CFAR vs THOR — Brief.pptx
@@ -1883,14 +1883,13 @@
           <p:nvPr/>
         </p:nvPicPr>
         <p:blipFill>
-          <a:blip r:embed="rId1"/>
-          <a:srcRect l="26042" r="26042" t="0" b="0"/>
+          <a:blip r:embed="rId4"/>
           <a:stretch/>
         </p:blipFill>
         <p:spPr>
           <a:xfrm>
             <a:off x="6350000" y="0"/>
-            <a:ext cx="5842000" cy="6858000"/>
+            <a:ext cx="5836920" cy="6858000"/>
           </a:xfrm>
           <a:prstGeom prst="rect">
             <a:avLst/>
